--- a/public/videos/repositories/golf-slot-watch/golf-slot-watch-tech-preview.pptx
+++ b/public/videos/repositories/golf-slot-watch/golf-slot-watch-tech-preview.pptx
@@ -134,7 +134,7 @@
           <p:cNvPr id="2" name="タイトル 1">
             <a:extLst>
               <a:ext uri="{FF2B5EF4-FFF2-40B4-BE49-F238E27FC236}">
-                <a16:creationId xmlns:a16="http://schemas.microsoft.com/office/drawing/2014/main" id="{2CD7FDEB-B28D-E7E3-D967-0449369FFEE0}"/>
+                <a16:creationId xmlns:a16="http://schemas.microsoft.com/office/drawing/2014/main" id="{EA0CA74F-77C4-0DFC-EBA6-4BD6D67454F3}"/>
               </a:ext>
             </a:extLst>
           </p:cNvPr>
@@ -171,7 +171,7 @@
           <p:cNvPr id="3" name="字幕 2">
             <a:extLst>
               <a:ext uri="{FF2B5EF4-FFF2-40B4-BE49-F238E27FC236}">
-                <a16:creationId xmlns:a16="http://schemas.microsoft.com/office/drawing/2014/main" id="{8CB098A9-5B98-7001-0FEC-AA381A64F864}"/>
+                <a16:creationId xmlns:a16="http://schemas.microsoft.com/office/drawing/2014/main" id="{26AA1D3E-562D-E245-2B49-B706FA3A8BD7}"/>
               </a:ext>
             </a:extLst>
           </p:cNvPr>
@@ -241,7 +241,7 @@
           <p:cNvPr id="4" name="日付プレースホルダー 3">
             <a:extLst>
               <a:ext uri="{FF2B5EF4-FFF2-40B4-BE49-F238E27FC236}">
-                <a16:creationId xmlns:a16="http://schemas.microsoft.com/office/drawing/2014/main" id="{060CC5BE-27A8-F679-37BA-975C0D450E53}"/>
+                <a16:creationId xmlns:a16="http://schemas.microsoft.com/office/drawing/2014/main" id="{51AB1EFB-2732-4C56-BF49-DAFF67768605}"/>
               </a:ext>
             </a:extLst>
           </p:cNvPr>
@@ -257,7 +257,7 @@
           <a:bodyPr/>
           <a:lstStyle/>
           <a:p>
-            <a:fld id="{6FB59898-E85E-422C-9FFE-6510EA2F151A}" type="datetimeFigureOut">
+            <a:fld id="{2C13E876-12E6-481F-AFC2-4CDD1ED75600}" type="datetimeFigureOut">
               <a:rPr kumimoji="1" lang="ja-JP" altLang="en-US" smtClean="0"/>
               <a:t>2026/7/30</a:t>
             </a:fld>
@@ -270,7 +270,7 @@
           <p:cNvPr id="5" name="フッター プレースホルダー 4">
             <a:extLst>
               <a:ext uri="{FF2B5EF4-FFF2-40B4-BE49-F238E27FC236}">
-                <a16:creationId xmlns:a16="http://schemas.microsoft.com/office/drawing/2014/main" id="{3BF6D737-EDB7-CD8D-BEB4-918EB0DAA21C}"/>
+                <a16:creationId xmlns:a16="http://schemas.microsoft.com/office/drawing/2014/main" id="{BF416661-083B-1FF8-F1A2-414F5602A137}"/>
               </a:ext>
             </a:extLst>
           </p:cNvPr>
@@ -295,7 +295,7 @@
           <p:cNvPr id="6" name="スライド番号プレースホルダー 5">
             <a:extLst>
               <a:ext uri="{FF2B5EF4-FFF2-40B4-BE49-F238E27FC236}">
-                <a16:creationId xmlns:a16="http://schemas.microsoft.com/office/drawing/2014/main" id="{F54F2E15-9139-96D9-F628-CB427AE28727}"/>
+                <a16:creationId xmlns:a16="http://schemas.microsoft.com/office/drawing/2014/main" id="{F2DFE31A-C066-0C2E-1E64-1ED529241891}"/>
               </a:ext>
             </a:extLst>
           </p:cNvPr>
@@ -311,7 +311,7 @@
           <a:bodyPr/>
           <a:lstStyle/>
           <a:p>
-            <a:fld id="{99674E38-AAA6-4421-831A-745346B8D044}" type="slidenum">
+            <a:fld id="{54B395C7-852E-49DF-A71F-C4CC8EDD2DE9}" type="slidenum">
               <a:rPr kumimoji="1" lang="ja-JP" altLang="en-US" smtClean="0"/>
               <a:t>‹#›</a:t>
             </a:fld>
@@ -322,7 +322,7 @@
     </p:spTree>
     <p:extLst>
       <p:ext uri="{BB962C8B-B14F-4D97-AF65-F5344CB8AC3E}">
-        <p14:creationId xmlns:p14="http://schemas.microsoft.com/office/powerpoint/2010/main" val="2358060519"/>
+        <p14:creationId xmlns:p14="http://schemas.microsoft.com/office/powerpoint/2010/main" val="43441609"/>
       </p:ext>
     </p:extLst>
   </p:cSld>
@@ -354,7 +354,7 @@
           <p:cNvPr id="2" name="タイトル 1">
             <a:extLst>
               <a:ext uri="{FF2B5EF4-FFF2-40B4-BE49-F238E27FC236}">
-                <a16:creationId xmlns:a16="http://schemas.microsoft.com/office/drawing/2014/main" id="{658C7868-BACD-E10F-F1FA-74A9F7A8D62A}"/>
+                <a16:creationId xmlns:a16="http://schemas.microsoft.com/office/drawing/2014/main" id="{D2CF3024-D2EE-AC0E-715A-3AB05015C06F}"/>
               </a:ext>
             </a:extLst>
           </p:cNvPr>
@@ -382,7 +382,7 @@
           <p:cNvPr id="3" name="縦書きテキスト プレースホルダー 2">
             <a:extLst>
               <a:ext uri="{FF2B5EF4-FFF2-40B4-BE49-F238E27FC236}">
-                <a16:creationId xmlns:a16="http://schemas.microsoft.com/office/drawing/2014/main" id="{7B2B8517-39A3-0FCE-5194-A310896D4009}"/>
+                <a16:creationId xmlns:a16="http://schemas.microsoft.com/office/drawing/2014/main" id="{80A86716-66F0-9D7E-448C-B702C2AEB0F5}"/>
               </a:ext>
             </a:extLst>
           </p:cNvPr>
@@ -471,7 +471,7 @@
           <p:cNvPr id="4" name="日付プレースホルダー 3">
             <a:extLst>
               <a:ext uri="{FF2B5EF4-FFF2-40B4-BE49-F238E27FC236}">
-                <a16:creationId xmlns:a16="http://schemas.microsoft.com/office/drawing/2014/main" id="{4EAA4194-701D-2F4E-763F-87304C5A316E}"/>
+                <a16:creationId xmlns:a16="http://schemas.microsoft.com/office/drawing/2014/main" id="{F02E3517-8750-11D4-0718-468E5CC9482F}"/>
               </a:ext>
             </a:extLst>
           </p:cNvPr>
@@ -487,7 +487,7 @@
           <a:bodyPr/>
           <a:lstStyle/>
           <a:p>
-            <a:fld id="{6FB59898-E85E-422C-9FFE-6510EA2F151A}" type="datetimeFigureOut">
+            <a:fld id="{2C13E876-12E6-481F-AFC2-4CDD1ED75600}" type="datetimeFigureOut">
               <a:rPr kumimoji="1" lang="ja-JP" altLang="en-US" smtClean="0"/>
               <a:t>2026/7/30</a:t>
             </a:fld>
@@ -500,7 +500,7 @@
           <p:cNvPr id="5" name="フッター プレースホルダー 4">
             <a:extLst>
               <a:ext uri="{FF2B5EF4-FFF2-40B4-BE49-F238E27FC236}">
-                <a16:creationId xmlns:a16="http://schemas.microsoft.com/office/drawing/2014/main" id="{DBB92CD6-E3FB-ECD1-85F2-25B76861499A}"/>
+                <a16:creationId xmlns:a16="http://schemas.microsoft.com/office/drawing/2014/main" id="{7A7F0631-414C-913D-BD03-19C35C92D64D}"/>
               </a:ext>
             </a:extLst>
           </p:cNvPr>
@@ -525,7 +525,7 @@
           <p:cNvPr id="6" name="スライド番号プレースホルダー 5">
             <a:extLst>
               <a:ext uri="{FF2B5EF4-FFF2-40B4-BE49-F238E27FC236}">
-                <a16:creationId xmlns:a16="http://schemas.microsoft.com/office/drawing/2014/main" id="{ADC69325-C1BC-1C5C-B3A2-3956B2D6CDB7}"/>
+                <a16:creationId xmlns:a16="http://schemas.microsoft.com/office/drawing/2014/main" id="{7C651AE6-C1D4-1061-C0C3-A20CC59C82E3}"/>
               </a:ext>
             </a:extLst>
           </p:cNvPr>
@@ -541,7 +541,7 @@
           <a:bodyPr/>
           <a:lstStyle/>
           <a:p>
-            <a:fld id="{99674E38-AAA6-4421-831A-745346B8D044}" type="slidenum">
+            <a:fld id="{54B395C7-852E-49DF-A71F-C4CC8EDD2DE9}" type="slidenum">
               <a:rPr kumimoji="1" lang="ja-JP" altLang="en-US" smtClean="0"/>
               <a:t>‹#›</a:t>
             </a:fld>
@@ -552,7 +552,7 @@
     </p:spTree>
     <p:extLst>
       <p:ext uri="{BB962C8B-B14F-4D97-AF65-F5344CB8AC3E}">
-        <p14:creationId xmlns:p14="http://schemas.microsoft.com/office/powerpoint/2010/main" val="3494420247"/>
+        <p14:creationId xmlns:p14="http://schemas.microsoft.com/office/powerpoint/2010/main" val="499388855"/>
       </p:ext>
     </p:extLst>
   </p:cSld>
@@ -584,7 +584,7 @@
           <p:cNvPr id="2" name="縦書きタイトル 1">
             <a:extLst>
               <a:ext uri="{FF2B5EF4-FFF2-40B4-BE49-F238E27FC236}">
-                <a16:creationId xmlns:a16="http://schemas.microsoft.com/office/drawing/2014/main" id="{70C4E9FC-618B-7AE7-06EA-7CE72C4804D8}"/>
+                <a16:creationId xmlns:a16="http://schemas.microsoft.com/office/drawing/2014/main" id="{3B40BE29-0196-69AF-D2E8-A5FD430111E3}"/>
               </a:ext>
             </a:extLst>
           </p:cNvPr>
@@ -617,7 +617,7 @@
           <p:cNvPr id="3" name="縦書きテキスト プレースホルダー 2">
             <a:extLst>
               <a:ext uri="{FF2B5EF4-FFF2-40B4-BE49-F238E27FC236}">
-                <a16:creationId xmlns:a16="http://schemas.microsoft.com/office/drawing/2014/main" id="{FC1865A6-D0DB-74D9-99A3-092A18FCCDF6}"/>
+                <a16:creationId xmlns:a16="http://schemas.microsoft.com/office/drawing/2014/main" id="{9041669E-0BC0-B779-BE36-9FDD8A4092A7}"/>
               </a:ext>
             </a:extLst>
           </p:cNvPr>
@@ -711,7 +711,7 @@
           <p:cNvPr id="4" name="日付プレースホルダー 3">
             <a:extLst>
               <a:ext uri="{FF2B5EF4-FFF2-40B4-BE49-F238E27FC236}">
-                <a16:creationId xmlns:a16="http://schemas.microsoft.com/office/drawing/2014/main" id="{7DC3AE94-77D9-B6F2-9C95-E77E99FD83E8}"/>
+                <a16:creationId xmlns:a16="http://schemas.microsoft.com/office/drawing/2014/main" id="{8C7727F2-6DF2-F95C-B08C-2FA9DE36BCBE}"/>
               </a:ext>
             </a:extLst>
           </p:cNvPr>
@@ -727,7 +727,7 @@
           <a:bodyPr/>
           <a:lstStyle/>
           <a:p>
-            <a:fld id="{6FB59898-E85E-422C-9FFE-6510EA2F151A}" type="datetimeFigureOut">
+            <a:fld id="{2C13E876-12E6-481F-AFC2-4CDD1ED75600}" type="datetimeFigureOut">
               <a:rPr kumimoji="1" lang="ja-JP" altLang="en-US" smtClean="0"/>
               <a:t>2026/7/30</a:t>
             </a:fld>
@@ -740,7 +740,7 @@
           <p:cNvPr id="5" name="フッター プレースホルダー 4">
             <a:extLst>
               <a:ext uri="{FF2B5EF4-FFF2-40B4-BE49-F238E27FC236}">
-                <a16:creationId xmlns:a16="http://schemas.microsoft.com/office/drawing/2014/main" id="{8195DC7A-257A-C239-0EB8-62341AA429AA}"/>
+                <a16:creationId xmlns:a16="http://schemas.microsoft.com/office/drawing/2014/main" id="{810E941F-98AA-660C-5494-BC65D36BBFA4}"/>
               </a:ext>
             </a:extLst>
           </p:cNvPr>
@@ -765,7 +765,7 @@
           <p:cNvPr id="6" name="スライド番号プレースホルダー 5">
             <a:extLst>
               <a:ext uri="{FF2B5EF4-FFF2-40B4-BE49-F238E27FC236}">
-                <a16:creationId xmlns:a16="http://schemas.microsoft.com/office/drawing/2014/main" id="{1FEA9834-01F2-123D-F44B-3339FF3237AA}"/>
+                <a16:creationId xmlns:a16="http://schemas.microsoft.com/office/drawing/2014/main" id="{5B62630E-13E7-C137-7D60-C4BA019986F6}"/>
               </a:ext>
             </a:extLst>
           </p:cNvPr>
@@ -781,7 +781,7 @@
           <a:bodyPr/>
           <a:lstStyle/>
           <a:p>
-            <a:fld id="{99674E38-AAA6-4421-831A-745346B8D044}" type="slidenum">
+            <a:fld id="{54B395C7-852E-49DF-A71F-C4CC8EDD2DE9}" type="slidenum">
               <a:rPr kumimoji="1" lang="ja-JP" altLang="en-US" smtClean="0"/>
               <a:t>‹#›</a:t>
             </a:fld>
@@ -792,7 +792,7 @@
     </p:spTree>
     <p:extLst>
       <p:ext uri="{BB962C8B-B14F-4D97-AF65-F5344CB8AC3E}">
-        <p14:creationId xmlns:p14="http://schemas.microsoft.com/office/powerpoint/2010/main" val="2642046850"/>
+        <p14:creationId xmlns:p14="http://schemas.microsoft.com/office/powerpoint/2010/main" val="1552800354"/>
       </p:ext>
     </p:extLst>
   </p:cSld>
@@ -824,7 +824,7 @@
           <p:cNvPr id="2" name="タイトル 1">
             <a:extLst>
               <a:ext uri="{FF2B5EF4-FFF2-40B4-BE49-F238E27FC236}">
-                <a16:creationId xmlns:a16="http://schemas.microsoft.com/office/drawing/2014/main" id="{BBB56B6B-8981-195E-91A6-76DB306964AB}"/>
+                <a16:creationId xmlns:a16="http://schemas.microsoft.com/office/drawing/2014/main" id="{A72C9A3F-F90C-DC6E-C45A-C550E1C6F027}"/>
               </a:ext>
             </a:extLst>
           </p:cNvPr>
@@ -852,7 +852,7 @@
           <p:cNvPr id="3" name="コンテンツ プレースホルダー 2">
             <a:extLst>
               <a:ext uri="{FF2B5EF4-FFF2-40B4-BE49-F238E27FC236}">
-                <a16:creationId xmlns:a16="http://schemas.microsoft.com/office/drawing/2014/main" id="{936C9272-55AB-ED3D-6237-89FD7F33824D}"/>
+                <a16:creationId xmlns:a16="http://schemas.microsoft.com/office/drawing/2014/main" id="{407BF149-57F7-D67A-87A3-AE73C9E56F22}"/>
               </a:ext>
             </a:extLst>
           </p:cNvPr>
@@ -941,7 +941,7 @@
           <p:cNvPr id="4" name="日付プレースホルダー 3">
             <a:extLst>
               <a:ext uri="{FF2B5EF4-FFF2-40B4-BE49-F238E27FC236}">
-                <a16:creationId xmlns:a16="http://schemas.microsoft.com/office/drawing/2014/main" id="{E829CB3B-C47F-B1F5-3A3E-A49F1699C969}"/>
+                <a16:creationId xmlns:a16="http://schemas.microsoft.com/office/drawing/2014/main" id="{241C1982-4E15-E058-75FD-F180BB9F5637}"/>
               </a:ext>
             </a:extLst>
           </p:cNvPr>
@@ -957,7 +957,7 @@
           <a:bodyPr/>
           <a:lstStyle/>
           <a:p>
-            <a:fld id="{6FB59898-E85E-422C-9FFE-6510EA2F151A}" type="datetimeFigureOut">
+            <a:fld id="{2C13E876-12E6-481F-AFC2-4CDD1ED75600}" type="datetimeFigureOut">
               <a:rPr kumimoji="1" lang="ja-JP" altLang="en-US" smtClean="0"/>
               <a:t>2026/7/30</a:t>
             </a:fld>
@@ -970,7 +970,7 @@
           <p:cNvPr id="5" name="フッター プレースホルダー 4">
             <a:extLst>
               <a:ext uri="{FF2B5EF4-FFF2-40B4-BE49-F238E27FC236}">
-                <a16:creationId xmlns:a16="http://schemas.microsoft.com/office/drawing/2014/main" id="{FE820AE5-B2E6-7404-7033-2C73ED698AC2}"/>
+                <a16:creationId xmlns:a16="http://schemas.microsoft.com/office/drawing/2014/main" id="{E771F6E7-B043-FF1A-CA0C-83FB06E93FEB}"/>
               </a:ext>
             </a:extLst>
           </p:cNvPr>
@@ -995,7 +995,7 @@
           <p:cNvPr id="6" name="スライド番号プレースホルダー 5">
             <a:extLst>
               <a:ext uri="{FF2B5EF4-FFF2-40B4-BE49-F238E27FC236}">
-                <a16:creationId xmlns:a16="http://schemas.microsoft.com/office/drawing/2014/main" id="{73B0AF6A-41C1-5AF3-2F8F-460056B2D376}"/>
+                <a16:creationId xmlns:a16="http://schemas.microsoft.com/office/drawing/2014/main" id="{D77AE915-90BB-380F-3958-5FF3F9D1CF50}"/>
               </a:ext>
             </a:extLst>
           </p:cNvPr>
@@ -1011,7 +1011,7 @@
           <a:bodyPr/>
           <a:lstStyle/>
           <a:p>
-            <a:fld id="{99674E38-AAA6-4421-831A-745346B8D044}" type="slidenum">
+            <a:fld id="{54B395C7-852E-49DF-A71F-C4CC8EDD2DE9}" type="slidenum">
               <a:rPr kumimoji="1" lang="ja-JP" altLang="en-US" smtClean="0"/>
               <a:t>‹#›</a:t>
             </a:fld>
@@ -1022,7 +1022,7 @@
     </p:spTree>
     <p:extLst>
       <p:ext uri="{BB962C8B-B14F-4D97-AF65-F5344CB8AC3E}">
-        <p14:creationId xmlns:p14="http://schemas.microsoft.com/office/powerpoint/2010/main" val="3336547654"/>
+        <p14:creationId xmlns:p14="http://schemas.microsoft.com/office/powerpoint/2010/main" val="530299990"/>
       </p:ext>
     </p:extLst>
   </p:cSld>
@@ -1054,7 +1054,7 @@
           <p:cNvPr id="2" name="タイトル 1">
             <a:extLst>
               <a:ext uri="{FF2B5EF4-FFF2-40B4-BE49-F238E27FC236}">
-                <a16:creationId xmlns:a16="http://schemas.microsoft.com/office/drawing/2014/main" id="{D92059A5-CD84-97C9-EACD-26BB0C8F5A98}"/>
+                <a16:creationId xmlns:a16="http://schemas.microsoft.com/office/drawing/2014/main" id="{9EAEE531-A691-54A6-7B92-B6A1F2300AEA}"/>
               </a:ext>
             </a:extLst>
           </p:cNvPr>
@@ -1091,7 +1091,7 @@
           <p:cNvPr id="3" name="テキスト プレースホルダー 2">
             <a:extLst>
               <a:ext uri="{FF2B5EF4-FFF2-40B4-BE49-F238E27FC236}">
-                <a16:creationId xmlns:a16="http://schemas.microsoft.com/office/drawing/2014/main" id="{98716516-D35E-2AC2-A2DB-50ACE96252F7}"/>
+                <a16:creationId xmlns:a16="http://schemas.microsoft.com/office/drawing/2014/main" id="{ED377F84-03F6-E40D-CCAA-EFF8F5B93FD7}"/>
               </a:ext>
             </a:extLst>
           </p:cNvPr>
@@ -1216,7 +1216,7 @@
           <p:cNvPr id="4" name="日付プレースホルダー 3">
             <a:extLst>
               <a:ext uri="{FF2B5EF4-FFF2-40B4-BE49-F238E27FC236}">
-                <a16:creationId xmlns:a16="http://schemas.microsoft.com/office/drawing/2014/main" id="{B8AD04D2-C533-7A4F-433D-90E9348AF703}"/>
+                <a16:creationId xmlns:a16="http://schemas.microsoft.com/office/drawing/2014/main" id="{E609B2A4-B0EB-6348-B6C1-8F76D712068E}"/>
               </a:ext>
             </a:extLst>
           </p:cNvPr>
@@ -1232,7 +1232,7 @@
           <a:bodyPr/>
           <a:lstStyle/>
           <a:p>
-            <a:fld id="{6FB59898-E85E-422C-9FFE-6510EA2F151A}" type="datetimeFigureOut">
+            <a:fld id="{2C13E876-12E6-481F-AFC2-4CDD1ED75600}" type="datetimeFigureOut">
               <a:rPr kumimoji="1" lang="ja-JP" altLang="en-US" smtClean="0"/>
               <a:t>2026/7/30</a:t>
             </a:fld>
@@ -1245,7 +1245,7 @@
           <p:cNvPr id="5" name="フッター プレースホルダー 4">
             <a:extLst>
               <a:ext uri="{FF2B5EF4-FFF2-40B4-BE49-F238E27FC236}">
-                <a16:creationId xmlns:a16="http://schemas.microsoft.com/office/drawing/2014/main" id="{9B059D46-92CA-E46E-15E9-B3A24161145E}"/>
+                <a16:creationId xmlns:a16="http://schemas.microsoft.com/office/drawing/2014/main" id="{AE7F77EF-6A1C-E30D-201E-CBB11559414A}"/>
               </a:ext>
             </a:extLst>
           </p:cNvPr>
@@ -1270,7 +1270,7 @@
           <p:cNvPr id="6" name="スライド番号プレースホルダー 5">
             <a:extLst>
               <a:ext uri="{FF2B5EF4-FFF2-40B4-BE49-F238E27FC236}">
-                <a16:creationId xmlns:a16="http://schemas.microsoft.com/office/drawing/2014/main" id="{EA8C05DE-C084-C683-B0D3-75A947C20129}"/>
+                <a16:creationId xmlns:a16="http://schemas.microsoft.com/office/drawing/2014/main" id="{45834799-2C3D-F301-1B4F-2FCC42B8091B}"/>
               </a:ext>
             </a:extLst>
           </p:cNvPr>
@@ -1286,7 +1286,7 @@
           <a:bodyPr/>
           <a:lstStyle/>
           <a:p>
-            <a:fld id="{99674E38-AAA6-4421-831A-745346B8D044}" type="slidenum">
+            <a:fld id="{54B395C7-852E-49DF-A71F-C4CC8EDD2DE9}" type="slidenum">
               <a:rPr kumimoji="1" lang="ja-JP" altLang="en-US" smtClean="0"/>
               <a:t>‹#›</a:t>
             </a:fld>
@@ -1297,7 +1297,7 @@
     </p:spTree>
     <p:extLst>
       <p:ext uri="{BB962C8B-B14F-4D97-AF65-F5344CB8AC3E}">
-        <p14:creationId xmlns:p14="http://schemas.microsoft.com/office/powerpoint/2010/main" val="4143908142"/>
+        <p14:creationId xmlns:p14="http://schemas.microsoft.com/office/powerpoint/2010/main" val="1522365133"/>
       </p:ext>
     </p:extLst>
   </p:cSld>
@@ -1329,7 +1329,7 @@
           <p:cNvPr id="2" name="タイトル 1">
             <a:extLst>
               <a:ext uri="{FF2B5EF4-FFF2-40B4-BE49-F238E27FC236}">
-                <a16:creationId xmlns:a16="http://schemas.microsoft.com/office/drawing/2014/main" id="{5A309184-4843-55F1-EC61-F9A23D43A3EE}"/>
+                <a16:creationId xmlns:a16="http://schemas.microsoft.com/office/drawing/2014/main" id="{4B8A4F2D-8701-9AE5-4AB0-BDAF4F11828D}"/>
               </a:ext>
             </a:extLst>
           </p:cNvPr>
@@ -1357,7 +1357,7 @@
           <p:cNvPr id="3" name="コンテンツ プレースホルダー 2">
             <a:extLst>
               <a:ext uri="{FF2B5EF4-FFF2-40B4-BE49-F238E27FC236}">
-                <a16:creationId xmlns:a16="http://schemas.microsoft.com/office/drawing/2014/main" id="{48CA64BF-F7E6-F98D-88AE-6A7330FA6AEE}"/>
+                <a16:creationId xmlns:a16="http://schemas.microsoft.com/office/drawing/2014/main" id="{21A1E0B5-AD4C-C040-9675-D5A480A3E8B9}"/>
               </a:ext>
             </a:extLst>
           </p:cNvPr>
@@ -1451,7 +1451,7 @@
           <p:cNvPr id="4" name="コンテンツ プレースホルダー 3">
             <a:extLst>
               <a:ext uri="{FF2B5EF4-FFF2-40B4-BE49-F238E27FC236}">
-                <a16:creationId xmlns:a16="http://schemas.microsoft.com/office/drawing/2014/main" id="{6B2002DB-01F3-BAFE-2FB5-B0D33EA4F300}"/>
+                <a16:creationId xmlns:a16="http://schemas.microsoft.com/office/drawing/2014/main" id="{34E16F18-2050-B3F4-F4C8-201AAE5386F4}"/>
               </a:ext>
             </a:extLst>
           </p:cNvPr>
@@ -1545,7 +1545,7 @@
           <p:cNvPr id="5" name="日付プレースホルダー 4">
             <a:extLst>
               <a:ext uri="{FF2B5EF4-FFF2-40B4-BE49-F238E27FC236}">
-                <a16:creationId xmlns:a16="http://schemas.microsoft.com/office/drawing/2014/main" id="{2E10E4CD-021A-F8B9-B51A-F26B5C5AF959}"/>
+                <a16:creationId xmlns:a16="http://schemas.microsoft.com/office/drawing/2014/main" id="{21E7528B-2D57-3265-B60E-8E9F5356656F}"/>
               </a:ext>
             </a:extLst>
           </p:cNvPr>
@@ -1561,7 +1561,7 @@
           <a:bodyPr/>
           <a:lstStyle/>
           <a:p>
-            <a:fld id="{6FB59898-E85E-422C-9FFE-6510EA2F151A}" type="datetimeFigureOut">
+            <a:fld id="{2C13E876-12E6-481F-AFC2-4CDD1ED75600}" type="datetimeFigureOut">
               <a:rPr kumimoji="1" lang="ja-JP" altLang="en-US" smtClean="0"/>
               <a:t>2026/7/30</a:t>
             </a:fld>
@@ -1574,7 +1574,7 @@
           <p:cNvPr id="6" name="フッター プレースホルダー 5">
             <a:extLst>
               <a:ext uri="{FF2B5EF4-FFF2-40B4-BE49-F238E27FC236}">
-                <a16:creationId xmlns:a16="http://schemas.microsoft.com/office/drawing/2014/main" id="{CC6F9C5C-3D71-85C8-5F85-CD0E563E6835}"/>
+                <a16:creationId xmlns:a16="http://schemas.microsoft.com/office/drawing/2014/main" id="{5691FDBF-6713-C53E-7351-343E760F5C9C}"/>
               </a:ext>
             </a:extLst>
           </p:cNvPr>
@@ -1599,7 +1599,7 @@
           <p:cNvPr id="7" name="スライド番号プレースホルダー 6">
             <a:extLst>
               <a:ext uri="{FF2B5EF4-FFF2-40B4-BE49-F238E27FC236}">
-                <a16:creationId xmlns:a16="http://schemas.microsoft.com/office/drawing/2014/main" id="{C32E20E6-70C5-C193-C7B7-525CDF58B75A}"/>
+                <a16:creationId xmlns:a16="http://schemas.microsoft.com/office/drawing/2014/main" id="{255A28CE-6A87-65DE-5059-597DAE0054CA}"/>
               </a:ext>
             </a:extLst>
           </p:cNvPr>
@@ -1615,7 +1615,7 @@
           <a:bodyPr/>
           <a:lstStyle/>
           <a:p>
-            <a:fld id="{99674E38-AAA6-4421-831A-745346B8D044}" type="slidenum">
+            <a:fld id="{54B395C7-852E-49DF-A71F-C4CC8EDD2DE9}" type="slidenum">
               <a:rPr kumimoji="1" lang="ja-JP" altLang="en-US" smtClean="0"/>
               <a:t>‹#›</a:t>
             </a:fld>
@@ -1626,7 +1626,7 @@
     </p:spTree>
     <p:extLst>
       <p:ext uri="{BB962C8B-B14F-4D97-AF65-F5344CB8AC3E}">
-        <p14:creationId xmlns:p14="http://schemas.microsoft.com/office/powerpoint/2010/main" val="3417611778"/>
+        <p14:creationId xmlns:p14="http://schemas.microsoft.com/office/powerpoint/2010/main" val="402959262"/>
       </p:ext>
     </p:extLst>
   </p:cSld>
@@ -1658,7 +1658,7 @@
           <p:cNvPr id="2" name="タイトル 1">
             <a:extLst>
               <a:ext uri="{FF2B5EF4-FFF2-40B4-BE49-F238E27FC236}">
-                <a16:creationId xmlns:a16="http://schemas.microsoft.com/office/drawing/2014/main" id="{BDE55AF9-EAFB-07B7-1382-08DBFB8F2A3B}"/>
+                <a16:creationId xmlns:a16="http://schemas.microsoft.com/office/drawing/2014/main" id="{3DC9972C-B271-A6C5-B368-15F71FC44B1F}"/>
               </a:ext>
             </a:extLst>
           </p:cNvPr>
@@ -1691,7 +1691,7 @@
           <p:cNvPr id="3" name="テキスト プレースホルダー 2">
             <a:extLst>
               <a:ext uri="{FF2B5EF4-FFF2-40B4-BE49-F238E27FC236}">
-                <a16:creationId xmlns:a16="http://schemas.microsoft.com/office/drawing/2014/main" id="{C81A29E1-64B8-F207-7DC3-B35E5CF39169}"/>
+                <a16:creationId xmlns:a16="http://schemas.microsoft.com/office/drawing/2014/main" id="{3CF13A66-83C2-F53D-BE41-E91937E964CE}"/>
               </a:ext>
             </a:extLst>
           </p:cNvPr>
@@ -1762,7 +1762,7 @@
           <p:cNvPr id="4" name="コンテンツ プレースホルダー 3">
             <a:extLst>
               <a:ext uri="{FF2B5EF4-FFF2-40B4-BE49-F238E27FC236}">
-                <a16:creationId xmlns:a16="http://schemas.microsoft.com/office/drawing/2014/main" id="{FC8F56D5-8197-F167-8415-13036C701DC2}"/>
+                <a16:creationId xmlns:a16="http://schemas.microsoft.com/office/drawing/2014/main" id="{03E4F0EC-33C8-E011-153C-00BDDACFDEF4}"/>
               </a:ext>
             </a:extLst>
           </p:cNvPr>
@@ -1856,7 +1856,7 @@
           <p:cNvPr id="5" name="テキスト プレースホルダー 4">
             <a:extLst>
               <a:ext uri="{FF2B5EF4-FFF2-40B4-BE49-F238E27FC236}">
-                <a16:creationId xmlns:a16="http://schemas.microsoft.com/office/drawing/2014/main" id="{A732E0B3-F4EB-A9DD-B996-3B375E3CD709}"/>
+                <a16:creationId xmlns:a16="http://schemas.microsoft.com/office/drawing/2014/main" id="{704050F7-0DF5-7767-2479-613BCCCF0B15}"/>
               </a:ext>
             </a:extLst>
           </p:cNvPr>
@@ -1927,7 +1927,7 @@
           <p:cNvPr id="6" name="コンテンツ プレースホルダー 5">
             <a:extLst>
               <a:ext uri="{FF2B5EF4-FFF2-40B4-BE49-F238E27FC236}">
-                <a16:creationId xmlns:a16="http://schemas.microsoft.com/office/drawing/2014/main" id="{0F326C65-48E4-0B87-40E6-C703EC1596F8}"/>
+                <a16:creationId xmlns:a16="http://schemas.microsoft.com/office/drawing/2014/main" id="{A6361290-DE77-AEA1-9175-EA9010FC56D7}"/>
               </a:ext>
             </a:extLst>
           </p:cNvPr>
@@ -2021,7 +2021,7 @@
           <p:cNvPr id="7" name="日付プレースホルダー 6">
             <a:extLst>
               <a:ext uri="{FF2B5EF4-FFF2-40B4-BE49-F238E27FC236}">
-                <a16:creationId xmlns:a16="http://schemas.microsoft.com/office/drawing/2014/main" id="{C8E1D682-14FA-26E2-798D-04257C5D327F}"/>
+                <a16:creationId xmlns:a16="http://schemas.microsoft.com/office/drawing/2014/main" id="{CA4CE3B3-AF3F-05D0-ACB6-D489DE0E2A62}"/>
               </a:ext>
             </a:extLst>
           </p:cNvPr>
@@ -2037,7 +2037,7 @@
           <a:bodyPr/>
           <a:lstStyle/>
           <a:p>
-            <a:fld id="{6FB59898-E85E-422C-9FFE-6510EA2F151A}" type="datetimeFigureOut">
+            <a:fld id="{2C13E876-12E6-481F-AFC2-4CDD1ED75600}" type="datetimeFigureOut">
               <a:rPr kumimoji="1" lang="ja-JP" altLang="en-US" smtClean="0"/>
               <a:t>2026/7/30</a:t>
             </a:fld>
@@ -2050,7 +2050,7 @@
           <p:cNvPr id="8" name="フッター プレースホルダー 7">
             <a:extLst>
               <a:ext uri="{FF2B5EF4-FFF2-40B4-BE49-F238E27FC236}">
-                <a16:creationId xmlns:a16="http://schemas.microsoft.com/office/drawing/2014/main" id="{2CACB1C6-8F4C-633E-3105-F69327BB71D1}"/>
+                <a16:creationId xmlns:a16="http://schemas.microsoft.com/office/drawing/2014/main" id="{7A56E1DA-4F94-3E37-E26D-52A30310EB49}"/>
               </a:ext>
             </a:extLst>
           </p:cNvPr>
@@ -2075,7 +2075,7 @@
           <p:cNvPr id="9" name="スライド番号プレースホルダー 8">
             <a:extLst>
               <a:ext uri="{FF2B5EF4-FFF2-40B4-BE49-F238E27FC236}">
-                <a16:creationId xmlns:a16="http://schemas.microsoft.com/office/drawing/2014/main" id="{A4D6E41B-BEC2-BCA6-F563-6D60A07CE1D1}"/>
+                <a16:creationId xmlns:a16="http://schemas.microsoft.com/office/drawing/2014/main" id="{AFE0BF86-BD32-7DA7-1429-E4A7B7C9EE9F}"/>
               </a:ext>
             </a:extLst>
           </p:cNvPr>
@@ -2091,7 +2091,7 @@
           <a:bodyPr/>
           <a:lstStyle/>
           <a:p>
-            <a:fld id="{99674E38-AAA6-4421-831A-745346B8D044}" type="slidenum">
+            <a:fld id="{54B395C7-852E-49DF-A71F-C4CC8EDD2DE9}" type="slidenum">
               <a:rPr kumimoji="1" lang="ja-JP" altLang="en-US" smtClean="0"/>
               <a:t>‹#›</a:t>
             </a:fld>
@@ -2102,7 +2102,7 @@
     </p:spTree>
     <p:extLst>
       <p:ext uri="{BB962C8B-B14F-4D97-AF65-F5344CB8AC3E}">
-        <p14:creationId xmlns:p14="http://schemas.microsoft.com/office/powerpoint/2010/main" val="834333387"/>
+        <p14:creationId xmlns:p14="http://schemas.microsoft.com/office/powerpoint/2010/main" val="2452946532"/>
       </p:ext>
     </p:extLst>
   </p:cSld>
@@ -2134,7 +2134,7 @@
           <p:cNvPr id="2" name="タイトル 1">
             <a:extLst>
               <a:ext uri="{FF2B5EF4-FFF2-40B4-BE49-F238E27FC236}">
-                <a16:creationId xmlns:a16="http://schemas.microsoft.com/office/drawing/2014/main" id="{8DE89F59-6EB3-6967-CDFD-933AEFE3055E}"/>
+                <a16:creationId xmlns:a16="http://schemas.microsoft.com/office/drawing/2014/main" id="{A251A308-DE99-3326-0A71-93A7F26848F4}"/>
               </a:ext>
             </a:extLst>
           </p:cNvPr>
@@ -2162,7 +2162,7 @@
           <p:cNvPr id="3" name="日付プレースホルダー 2">
             <a:extLst>
               <a:ext uri="{FF2B5EF4-FFF2-40B4-BE49-F238E27FC236}">
-                <a16:creationId xmlns:a16="http://schemas.microsoft.com/office/drawing/2014/main" id="{45CFAF0A-0477-6969-8C95-214E55E88ECE}"/>
+                <a16:creationId xmlns:a16="http://schemas.microsoft.com/office/drawing/2014/main" id="{2358B89D-4E7B-B52F-290D-15D835A9B832}"/>
               </a:ext>
             </a:extLst>
           </p:cNvPr>
@@ -2178,7 +2178,7 @@
           <a:bodyPr/>
           <a:lstStyle/>
           <a:p>
-            <a:fld id="{6FB59898-E85E-422C-9FFE-6510EA2F151A}" type="datetimeFigureOut">
+            <a:fld id="{2C13E876-12E6-481F-AFC2-4CDD1ED75600}" type="datetimeFigureOut">
               <a:rPr kumimoji="1" lang="ja-JP" altLang="en-US" smtClean="0"/>
               <a:t>2026/7/30</a:t>
             </a:fld>
@@ -2191,7 +2191,7 @@
           <p:cNvPr id="4" name="フッター プレースホルダー 3">
             <a:extLst>
               <a:ext uri="{FF2B5EF4-FFF2-40B4-BE49-F238E27FC236}">
-                <a16:creationId xmlns:a16="http://schemas.microsoft.com/office/drawing/2014/main" id="{0887EB6D-1087-3D5E-2314-431CABAFFD0D}"/>
+                <a16:creationId xmlns:a16="http://schemas.microsoft.com/office/drawing/2014/main" id="{3A6AC4AC-646B-33CD-CBA5-47652BACE077}"/>
               </a:ext>
             </a:extLst>
           </p:cNvPr>
@@ -2216,7 +2216,7 @@
           <p:cNvPr id="5" name="スライド番号プレースホルダー 4">
             <a:extLst>
               <a:ext uri="{FF2B5EF4-FFF2-40B4-BE49-F238E27FC236}">
-                <a16:creationId xmlns:a16="http://schemas.microsoft.com/office/drawing/2014/main" id="{D5EFA66A-AC5B-12C6-9BF0-39807C75549E}"/>
+                <a16:creationId xmlns:a16="http://schemas.microsoft.com/office/drawing/2014/main" id="{17C41163-CD0B-C6A5-B908-25A3AB180682}"/>
               </a:ext>
             </a:extLst>
           </p:cNvPr>
@@ -2232,7 +2232,7 @@
           <a:bodyPr/>
           <a:lstStyle/>
           <a:p>
-            <a:fld id="{99674E38-AAA6-4421-831A-745346B8D044}" type="slidenum">
+            <a:fld id="{54B395C7-852E-49DF-A71F-C4CC8EDD2DE9}" type="slidenum">
               <a:rPr kumimoji="1" lang="ja-JP" altLang="en-US" smtClean="0"/>
               <a:t>‹#›</a:t>
             </a:fld>
@@ -2243,7 +2243,7 @@
     </p:spTree>
     <p:extLst>
       <p:ext uri="{BB962C8B-B14F-4D97-AF65-F5344CB8AC3E}">
-        <p14:creationId xmlns:p14="http://schemas.microsoft.com/office/powerpoint/2010/main" val="255264374"/>
+        <p14:creationId xmlns:p14="http://schemas.microsoft.com/office/powerpoint/2010/main" val="1826891643"/>
       </p:ext>
     </p:extLst>
   </p:cSld>
@@ -2275,7 +2275,7 @@
           <p:cNvPr id="2" name="日付プレースホルダー 1">
             <a:extLst>
               <a:ext uri="{FF2B5EF4-FFF2-40B4-BE49-F238E27FC236}">
-                <a16:creationId xmlns:a16="http://schemas.microsoft.com/office/drawing/2014/main" id="{FCFF0F6E-1B50-124D-3966-34DF7633D1AF}"/>
+                <a16:creationId xmlns:a16="http://schemas.microsoft.com/office/drawing/2014/main" id="{B006D14E-5944-E4C2-C41B-3BC2BF792A05}"/>
               </a:ext>
             </a:extLst>
           </p:cNvPr>
@@ -2291,7 +2291,7 @@
           <a:bodyPr/>
           <a:lstStyle/>
           <a:p>
-            <a:fld id="{6FB59898-E85E-422C-9FFE-6510EA2F151A}" type="datetimeFigureOut">
+            <a:fld id="{2C13E876-12E6-481F-AFC2-4CDD1ED75600}" type="datetimeFigureOut">
               <a:rPr kumimoji="1" lang="ja-JP" altLang="en-US" smtClean="0"/>
               <a:t>2026/7/30</a:t>
             </a:fld>
@@ -2304,7 +2304,7 @@
           <p:cNvPr id="3" name="フッター プレースホルダー 2">
             <a:extLst>
               <a:ext uri="{FF2B5EF4-FFF2-40B4-BE49-F238E27FC236}">
-                <a16:creationId xmlns:a16="http://schemas.microsoft.com/office/drawing/2014/main" id="{E10CD455-E6A8-F0DB-1E44-D60F908ED4D0}"/>
+                <a16:creationId xmlns:a16="http://schemas.microsoft.com/office/drawing/2014/main" id="{D09D2AC2-399F-1385-787A-FC49CDFC8B13}"/>
               </a:ext>
             </a:extLst>
           </p:cNvPr>
@@ -2329,7 +2329,7 @@
           <p:cNvPr id="4" name="スライド番号プレースホルダー 3">
             <a:extLst>
               <a:ext uri="{FF2B5EF4-FFF2-40B4-BE49-F238E27FC236}">
-                <a16:creationId xmlns:a16="http://schemas.microsoft.com/office/drawing/2014/main" id="{2895633A-FAB3-FA9A-D9B5-AD4E7C7ABD96}"/>
+                <a16:creationId xmlns:a16="http://schemas.microsoft.com/office/drawing/2014/main" id="{4C8CCCCE-65B8-0FE8-E36F-CDA9A4B09323}"/>
               </a:ext>
             </a:extLst>
           </p:cNvPr>
@@ -2345,7 +2345,7 @@
           <a:bodyPr/>
           <a:lstStyle/>
           <a:p>
-            <a:fld id="{99674E38-AAA6-4421-831A-745346B8D044}" type="slidenum">
+            <a:fld id="{54B395C7-852E-49DF-A71F-C4CC8EDD2DE9}" type="slidenum">
               <a:rPr kumimoji="1" lang="ja-JP" altLang="en-US" smtClean="0"/>
               <a:t>‹#›</a:t>
             </a:fld>
@@ -2356,7 +2356,7 @@
     </p:spTree>
     <p:extLst>
       <p:ext uri="{BB962C8B-B14F-4D97-AF65-F5344CB8AC3E}">
-        <p14:creationId xmlns:p14="http://schemas.microsoft.com/office/powerpoint/2010/main" val="4218753371"/>
+        <p14:creationId xmlns:p14="http://schemas.microsoft.com/office/powerpoint/2010/main" val="3046074618"/>
       </p:ext>
     </p:extLst>
   </p:cSld>
@@ -2388,7 +2388,7 @@
           <p:cNvPr id="2" name="タイトル 1">
             <a:extLst>
               <a:ext uri="{FF2B5EF4-FFF2-40B4-BE49-F238E27FC236}">
-                <a16:creationId xmlns:a16="http://schemas.microsoft.com/office/drawing/2014/main" id="{4D119D29-1B58-25A5-827E-5CD916033CF2}"/>
+                <a16:creationId xmlns:a16="http://schemas.microsoft.com/office/drawing/2014/main" id="{C9DDF2C0-FE33-B1CA-3146-F71702FC946E}"/>
               </a:ext>
             </a:extLst>
           </p:cNvPr>
@@ -2425,7 +2425,7 @@
           <p:cNvPr id="3" name="コンテンツ プレースホルダー 2">
             <a:extLst>
               <a:ext uri="{FF2B5EF4-FFF2-40B4-BE49-F238E27FC236}">
-                <a16:creationId xmlns:a16="http://schemas.microsoft.com/office/drawing/2014/main" id="{635D5478-8036-0549-F622-3B6FFB27A6D1}"/>
+                <a16:creationId xmlns:a16="http://schemas.microsoft.com/office/drawing/2014/main" id="{D831D051-3599-F2AB-6F3F-D5A769228C33}"/>
               </a:ext>
             </a:extLst>
           </p:cNvPr>
@@ -2547,7 +2547,7 @@
           <p:cNvPr id="4" name="テキスト プレースホルダー 3">
             <a:extLst>
               <a:ext uri="{FF2B5EF4-FFF2-40B4-BE49-F238E27FC236}">
-                <a16:creationId xmlns:a16="http://schemas.microsoft.com/office/drawing/2014/main" id="{13117C71-778C-3D68-794C-FCEC54FA5B99}"/>
+                <a16:creationId xmlns:a16="http://schemas.microsoft.com/office/drawing/2014/main" id="{22178E30-1F66-BDA9-4479-DD496ADD02F8}"/>
               </a:ext>
             </a:extLst>
           </p:cNvPr>
@@ -2618,7 +2618,7 @@
           <p:cNvPr id="5" name="日付プレースホルダー 4">
             <a:extLst>
               <a:ext uri="{FF2B5EF4-FFF2-40B4-BE49-F238E27FC236}">
-                <a16:creationId xmlns:a16="http://schemas.microsoft.com/office/drawing/2014/main" id="{EE1A05AF-9F4E-9C12-EA88-170E3AE73D01}"/>
+                <a16:creationId xmlns:a16="http://schemas.microsoft.com/office/drawing/2014/main" id="{5E5AE541-092A-5308-EBF3-DF78F2E6363F}"/>
               </a:ext>
             </a:extLst>
           </p:cNvPr>
@@ -2634,7 +2634,7 @@
           <a:bodyPr/>
           <a:lstStyle/>
           <a:p>
-            <a:fld id="{6FB59898-E85E-422C-9FFE-6510EA2F151A}" type="datetimeFigureOut">
+            <a:fld id="{2C13E876-12E6-481F-AFC2-4CDD1ED75600}" type="datetimeFigureOut">
               <a:rPr kumimoji="1" lang="ja-JP" altLang="en-US" smtClean="0"/>
               <a:t>2026/7/30</a:t>
             </a:fld>
@@ -2647,7 +2647,7 @@
           <p:cNvPr id="6" name="フッター プレースホルダー 5">
             <a:extLst>
               <a:ext uri="{FF2B5EF4-FFF2-40B4-BE49-F238E27FC236}">
-                <a16:creationId xmlns:a16="http://schemas.microsoft.com/office/drawing/2014/main" id="{02B08B05-21D9-0859-E0FC-7AB1A29B32DC}"/>
+                <a16:creationId xmlns:a16="http://schemas.microsoft.com/office/drawing/2014/main" id="{F21C777C-A76A-5079-DE5E-1E90CC78F48B}"/>
               </a:ext>
             </a:extLst>
           </p:cNvPr>
@@ -2672,7 +2672,7 @@
           <p:cNvPr id="7" name="スライド番号プレースホルダー 6">
             <a:extLst>
               <a:ext uri="{FF2B5EF4-FFF2-40B4-BE49-F238E27FC236}">
-                <a16:creationId xmlns:a16="http://schemas.microsoft.com/office/drawing/2014/main" id="{D2531FAF-2742-4F17-3708-908CFFCCC4C3}"/>
+                <a16:creationId xmlns:a16="http://schemas.microsoft.com/office/drawing/2014/main" id="{B9548526-ED2B-A0DB-446D-C9DAF0959C6E}"/>
               </a:ext>
             </a:extLst>
           </p:cNvPr>
@@ -2688,7 +2688,7 @@
           <a:bodyPr/>
           <a:lstStyle/>
           <a:p>
-            <a:fld id="{99674E38-AAA6-4421-831A-745346B8D044}" type="slidenum">
+            <a:fld id="{54B395C7-852E-49DF-A71F-C4CC8EDD2DE9}" type="slidenum">
               <a:rPr kumimoji="1" lang="ja-JP" altLang="en-US" smtClean="0"/>
               <a:t>‹#›</a:t>
             </a:fld>
@@ -2699,7 +2699,7 @@
     </p:spTree>
     <p:extLst>
       <p:ext uri="{BB962C8B-B14F-4D97-AF65-F5344CB8AC3E}">
-        <p14:creationId xmlns:p14="http://schemas.microsoft.com/office/powerpoint/2010/main" val="803126217"/>
+        <p14:creationId xmlns:p14="http://schemas.microsoft.com/office/powerpoint/2010/main" val="4035419632"/>
       </p:ext>
     </p:extLst>
   </p:cSld>
@@ -2731,7 +2731,7 @@
           <p:cNvPr id="2" name="タイトル 1">
             <a:extLst>
               <a:ext uri="{FF2B5EF4-FFF2-40B4-BE49-F238E27FC236}">
-                <a16:creationId xmlns:a16="http://schemas.microsoft.com/office/drawing/2014/main" id="{8B22B397-4499-6E72-1852-42E87ADC13E6}"/>
+                <a16:creationId xmlns:a16="http://schemas.microsoft.com/office/drawing/2014/main" id="{2FD4E887-C63F-F1C2-D43D-3E625D18A4A0}"/>
               </a:ext>
             </a:extLst>
           </p:cNvPr>
@@ -2768,7 +2768,7 @@
           <p:cNvPr id="3" name="図プレースホルダー 2">
             <a:extLst>
               <a:ext uri="{FF2B5EF4-FFF2-40B4-BE49-F238E27FC236}">
-                <a16:creationId xmlns:a16="http://schemas.microsoft.com/office/drawing/2014/main" id="{A0A394B5-50AC-F055-8715-33C463D460B1}"/>
+                <a16:creationId xmlns:a16="http://schemas.microsoft.com/office/drawing/2014/main" id="{5E5D68B6-D881-FD53-DF13-FCE89B297CCF}"/>
               </a:ext>
             </a:extLst>
           </p:cNvPr>
@@ -2835,7 +2835,7 @@
           <p:cNvPr id="4" name="テキスト プレースホルダー 3">
             <a:extLst>
               <a:ext uri="{FF2B5EF4-FFF2-40B4-BE49-F238E27FC236}">
-                <a16:creationId xmlns:a16="http://schemas.microsoft.com/office/drawing/2014/main" id="{F98FB9B7-99FF-3C94-E076-14B26B20A87E}"/>
+                <a16:creationId xmlns:a16="http://schemas.microsoft.com/office/drawing/2014/main" id="{B8733A1D-E36E-9E97-8183-E267A9E3FDAC}"/>
               </a:ext>
             </a:extLst>
           </p:cNvPr>
@@ -2906,7 +2906,7 @@
           <p:cNvPr id="5" name="日付プレースホルダー 4">
             <a:extLst>
               <a:ext uri="{FF2B5EF4-FFF2-40B4-BE49-F238E27FC236}">
-                <a16:creationId xmlns:a16="http://schemas.microsoft.com/office/drawing/2014/main" id="{06D9D485-1F22-E19F-24D5-9A3DE7112D25}"/>
+                <a16:creationId xmlns:a16="http://schemas.microsoft.com/office/drawing/2014/main" id="{E0EA35BB-4563-1672-1FEE-1A61C0AE59B8}"/>
               </a:ext>
             </a:extLst>
           </p:cNvPr>
@@ -2922,7 +2922,7 @@
           <a:bodyPr/>
           <a:lstStyle/>
           <a:p>
-            <a:fld id="{6FB59898-E85E-422C-9FFE-6510EA2F151A}" type="datetimeFigureOut">
+            <a:fld id="{2C13E876-12E6-481F-AFC2-4CDD1ED75600}" type="datetimeFigureOut">
               <a:rPr kumimoji="1" lang="ja-JP" altLang="en-US" smtClean="0"/>
               <a:t>2026/7/30</a:t>
             </a:fld>
@@ -2935,7 +2935,7 @@
           <p:cNvPr id="6" name="フッター プレースホルダー 5">
             <a:extLst>
               <a:ext uri="{FF2B5EF4-FFF2-40B4-BE49-F238E27FC236}">
-                <a16:creationId xmlns:a16="http://schemas.microsoft.com/office/drawing/2014/main" id="{F4283359-F1C1-9421-A067-513730AA0984}"/>
+                <a16:creationId xmlns:a16="http://schemas.microsoft.com/office/drawing/2014/main" id="{666E88DF-5986-0795-3CE2-9C28EBB4B0DD}"/>
               </a:ext>
             </a:extLst>
           </p:cNvPr>
@@ -2960,7 +2960,7 @@
           <p:cNvPr id="7" name="スライド番号プレースホルダー 6">
             <a:extLst>
               <a:ext uri="{FF2B5EF4-FFF2-40B4-BE49-F238E27FC236}">
-                <a16:creationId xmlns:a16="http://schemas.microsoft.com/office/drawing/2014/main" id="{DCEDFEFE-EDC5-C0A8-2181-FED2CAAB4294}"/>
+                <a16:creationId xmlns:a16="http://schemas.microsoft.com/office/drawing/2014/main" id="{3BC65FE7-CB88-6514-EC26-1333908B97E5}"/>
               </a:ext>
             </a:extLst>
           </p:cNvPr>
@@ -2976,7 +2976,7 @@
           <a:bodyPr/>
           <a:lstStyle/>
           <a:p>
-            <a:fld id="{99674E38-AAA6-4421-831A-745346B8D044}" type="slidenum">
+            <a:fld id="{54B395C7-852E-49DF-A71F-C4CC8EDD2DE9}" type="slidenum">
               <a:rPr kumimoji="1" lang="ja-JP" altLang="en-US" smtClean="0"/>
               <a:t>‹#›</a:t>
             </a:fld>
@@ -2987,7 +2987,7 @@
     </p:spTree>
     <p:extLst>
       <p:ext uri="{BB962C8B-B14F-4D97-AF65-F5344CB8AC3E}">
-        <p14:creationId xmlns:p14="http://schemas.microsoft.com/office/powerpoint/2010/main" val="4258036871"/>
+        <p14:creationId xmlns:p14="http://schemas.microsoft.com/office/powerpoint/2010/main" val="3699843398"/>
       </p:ext>
     </p:extLst>
   </p:cSld>
@@ -3024,7 +3024,7 @@
           <p:cNvPr id="2" name="タイトル プレースホルダー 1">
             <a:extLst>
               <a:ext uri="{FF2B5EF4-FFF2-40B4-BE49-F238E27FC236}">
-                <a16:creationId xmlns:a16="http://schemas.microsoft.com/office/drawing/2014/main" id="{E0DEC78F-A235-5D35-BB14-C7289A34ED32}"/>
+                <a16:creationId xmlns:a16="http://schemas.microsoft.com/office/drawing/2014/main" id="{D3124C4B-39B3-73EA-288A-EA9E0A06BB10}"/>
               </a:ext>
             </a:extLst>
           </p:cNvPr>
@@ -3062,7 +3062,7 @@
           <p:cNvPr id="3" name="テキスト プレースホルダー 2">
             <a:extLst>
               <a:ext uri="{FF2B5EF4-FFF2-40B4-BE49-F238E27FC236}">
-                <a16:creationId xmlns:a16="http://schemas.microsoft.com/office/drawing/2014/main" id="{A3969272-C58B-E485-2600-9B9F1FC6F736}"/>
+                <a16:creationId xmlns:a16="http://schemas.microsoft.com/office/drawing/2014/main" id="{58110B66-7A38-35AE-4FC6-C97B5434B66B}"/>
               </a:ext>
             </a:extLst>
           </p:cNvPr>
@@ -3161,7 +3161,7 @@
           <p:cNvPr id="4" name="日付プレースホルダー 3">
             <a:extLst>
               <a:ext uri="{FF2B5EF4-FFF2-40B4-BE49-F238E27FC236}">
-                <a16:creationId xmlns:a16="http://schemas.microsoft.com/office/drawing/2014/main" id="{424B32BF-F5A9-3784-98DB-0CA1FBF71618}"/>
+                <a16:creationId xmlns:a16="http://schemas.microsoft.com/office/drawing/2014/main" id="{75C113C1-F0C9-F3BB-2937-B3A47F7157AF}"/>
               </a:ext>
             </a:extLst>
           </p:cNvPr>
@@ -3195,7 +3195,7 @@
             </a:lvl1pPr>
           </a:lstStyle>
           <a:p>
-            <a:fld id="{6FB59898-E85E-422C-9FFE-6510EA2F151A}" type="datetimeFigureOut">
+            <a:fld id="{2C13E876-12E6-481F-AFC2-4CDD1ED75600}" type="datetimeFigureOut">
               <a:rPr kumimoji="1" lang="ja-JP" altLang="en-US" smtClean="0"/>
               <a:t>2026/7/30</a:t>
             </a:fld>
@@ -3208,7 +3208,7 @@
           <p:cNvPr id="5" name="フッター プレースホルダー 4">
             <a:extLst>
               <a:ext uri="{FF2B5EF4-FFF2-40B4-BE49-F238E27FC236}">
-                <a16:creationId xmlns:a16="http://schemas.microsoft.com/office/drawing/2014/main" id="{60788A61-E251-8670-DE22-41E365E7E142}"/>
+                <a16:creationId xmlns:a16="http://schemas.microsoft.com/office/drawing/2014/main" id="{755C6C82-3947-66A1-5EC9-BEFC56C92C97}"/>
               </a:ext>
             </a:extLst>
           </p:cNvPr>
@@ -3251,7 +3251,7 @@
           <p:cNvPr id="6" name="スライド番号プレースホルダー 5">
             <a:extLst>
               <a:ext uri="{FF2B5EF4-FFF2-40B4-BE49-F238E27FC236}">
-                <a16:creationId xmlns:a16="http://schemas.microsoft.com/office/drawing/2014/main" id="{8F01FBEB-952B-C100-1415-0D28523F9409}"/>
+                <a16:creationId xmlns:a16="http://schemas.microsoft.com/office/drawing/2014/main" id="{F18908C7-2C0A-4F88-DFC4-97B2FF44A28F}"/>
               </a:ext>
             </a:extLst>
           </p:cNvPr>
@@ -3285,7 +3285,7 @@
             </a:lvl1pPr>
           </a:lstStyle>
           <a:p>
-            <a:fld id="{99674E38-AAA6-4421-831A-745346B8D044}" type="slidenum">
+            <a:fld id="{54B395C7-852E-49DF-A71F-C4CC8EDD2DE9}" type="slidenum">
               <a:rPr kumimoji="1" lang="ja-JP" altLang="en-US" smtClean="0"/>
               <a:t>‹#›</a:t>
             </a:fld>
@@ -3296,7 +3296,7 @@
     </p:spTree>
     <p:extLst>
       <p:ext uri="{BB962C8B-B14F-4D97-AF65-F5344CB8AC3E}">
-        <p14:creationId xmlns:p14="http://schemas.microsoft.com/office/powerpoint/2010/main" val="2069910389"/>
+        <p14:creationId xmlns:p14="http://schemas.microsoft.com/office/powerpoint/2010/main" val="548120115"/>
       </p:ext>
     </p:extLst>
   </p:cSld>
@@ -3619,7 +3619,7 @@
           <p:cNvPr id="2" name="テキスト ボックス 1">
             <a:extLst>
               <a:ext uri="{FF2B5EF4-FFF2-40B4-BE49-F238E27FC236}">
-                <a16:creationId xmlns:a16="http://schemas.microsoft.com/office/drawing/2014/main" id="{A398BA6F-D08D-B6A7-2F9E-AEA89E365FAE}"/>
+                <a16:creationId xmlns:a16="http://schemas.microsoft.com/office/drawing/2014/main" id="{2013501B-958D-556D-55CB-CE92B2943B2F}"/>
               </a:ext>
             </a:extLst>
           </p:cNvPr>
@@ -3665,7 +3665,7 @@
           <p:cNvPr id="3" name="テキスト ボックス 2">
             <a:extLst>
               <a:ext uri="{FF2B5EF4-FFF2-40B4-BE49-F238E27FC236}">
-                <a16:creationId xmlns:a16="http://schemas.microsoft.com/office/drawing/2014/main" id="{97801AAE-92D3-8476-56CD-868C4C225A3E}"/>
+                <a16:creationId xmlns:a16="http://schemas.microsoft.com/office/drawing/2014/main" id="{8E54A8B0-693C-ECB5-2268-95B6A2946B18}"/>
               </a:ext>
             </a:extLst>
           </p:cNvPr>
@@ -3714,7 +3714,7 @@
           <p:cNvPr id="4" name="テキスト ボックス 3">
             <a:extLst>
               <a:ext uri="{FF2B5EF4-FFF2-40B4-BE49-F238E27FC236}">
-                <a16:creationId xmlns:a16="http://schemas.microsoft.com/office/drawing/2014/main" id="{B57300FD-FF75-917D-7A2F-1D9E71071A93}"/>
+                <a16:creationId xmlns:a16="http://schemas.microsoft.com/office/drawing/2014/main" id="{1AAD0461-0EC8-0989-B708-37A08BB31BE3}"/>
               </a:ext>
             </a:extLst>
           </p:cNvPr>
@@ -3754,7 +3754,7 @@
           <p:cNvPr id="5" name="テキスト ボックス 4">
             <a:extLst>
               <a:ext uri="{FF2B5EF4-FFF2-40B4-BE49-F238E27FC236}">
-                <a16:creationId xmlns:a16="http://schemas.microsoft.com/office/drawing/2014/main" id="{A92CFEE6-CAE2-3D8B-57AE-C917AEB4348B}"/>
+                <a16:creationId xmlns:a16="http://schemas.microsoft.com/office/drawing/2014/main" id="{C51EC80B-7DC4-943D-9EF4-C6E6D1FD5686}"/>
               </a:ext>
             </a:extLst>
           </p:cNvPr>
@@ -3801,7 +3801,7 @@
             <a:hlinkClick r:id="" action="ppaction://media"/>
             <a:extLst>
               <a:ext uri="{FF2B5EF4-FFF2-40B4-BE49-F238E27FC236}">
-                <a16:creationId xmlns:a16="http://schemas.microsoft.com/office/drawing/2014/main" id="{83FE30E7-E787-FAD2-D5C4-242F11A90794}"/>
+                <a16:creationId xmlns:a16="http://schemas.microsoft.com/office/drawing/2014/main" id="{5312B5F1-B163-6F30-23F1-BDF927AD6FBC}"/>
               </a:ext>
             </a:extLst>
           </p:cNvPr>
@@ -3836,7 +3836,7 @@
     </p:spTree>
     <p:extLst>
       <p:ext uri="{BB962C8B-B14F-4D97-AF65-F5344CB8AC3E}">
-        <p14:creationId xmlns:p14="http://schemas.microsoft.com/office/powerpoint/2010/main" val="3743657741"/>
+        <p14:creationId xmlns:p14="http://schemas.microsoft.com/office/powerpoint/2010/main" val="878885624"/>
       </p:ext>
     </p:extLst>
   </p:cSld>
@@ -3960,7 +3960,7 @@
           <p:cNvPr id="2" name="テキスト ボックス 1">
             <a:extLst>
               <a:ext uri="{FF2B5EF4-FFF2-40B4-BE49-F238E27FC236}">
-                <a16:creationId xmlns:a16="http://schemas.microsoft.com/office/drawing/2014/main" id="{99CD2C9F-B12A-CB31-B4D9-5082C811497E}"/>
+                <a16:creationId xmlns:a16="http://schemas.microsoft.com/office/drawing/2014/main" id="{6ABD0EAC-53D8-D323-F16B-77A13FAD66D1}"/>
               </a:ext>
             </a:extLst>
           </p:cNvPr>
@@ -4006,7 +4006,7 @@
           <p:cNvPr id="3" name="テキスト ボックス 2">
             <a:extLst>
               <a:ext uri="{FF2B5EF4-FFF2-40B4-BE49-F238E27FC236}">
-                <a16:creationId xmlns:a16="http://schemas.microsoft.com/office/drawing/2014/main" id="{281A39D3-0B78-EA68-9D52-2036BD4662B7}"/>
+                <a16:creationId xmlns:a16="http://schemas.microsoft.com/office/drawing/2014/main" id="{3344F0EC-CD28-CC46-2858-7FE1FB75175C}"/>
               </a:ext>
             </a:extLst>
           </p:cNvPr>
@@ -4046,7 +4046,7 @@
           <p:cNvPr id="4" name="テキスト ボックス 3">
             <a:extLst>
               <a:ext uri="{FF2B5EF4-FFF2-40B4-BE49-F238E27FC236}">
-                <a16:creationId xmlns:a16="http://schemas.microsoft.com/office/drawing/2014/main" id="{49B1B0E4-9003-9A7C-71D9-F87831F36EFC}"/>
+                <a16:creationId xmlns:a16="http://schemas.microsoft.com/office/drawing/2014/main" id="{C41708C3-0D06-FA8E-FE83-3E6D94775FAC}"/>
               </a:ext>
             </a:extLst>
           </p:cNvPr>
@@ -4110,7 +4110,7 @@
           <p:cNvPr id="5" name="テキスト ボックス 4">
             <a:extLst>
               <a:ext uri="{FF2B5EF4-FFF2-40B4-BE49-F238E27FC236}">
-                <a16:creationId xmlns:a16="http://schemas.microsoft.com/office/drawing/2014/main" id="{ACD67008-FBC7-934A-0D68-97C1C8E26F07}"/>
+                <a16:creationId xmlns:a16="http://schemas.microsoft.com/office/drawing/2014/main" id="{0740288F-FA50-9E78-842A-F4B46DF81B71}"/>
               </a:ext>
             </a:extLst>
           </p:cNvPr>
@@ -4157,7 +4157,7 @@
             <a:hlinkClick r:id="" action="ppaction://media"/>
             <a:extLst>
               <a:ext uri="{FF2B5EF4-FFF2-40B4-BE49-F238E27FC236}">
-                <a16:creationId xmlns:a16="http://schemas.microsoft.com/office/drawing/2014/main" id="{794379D7-CAB7-92F6-D4A5-0ECEB7FBC3E0}"/>
+                <a16:creationId xmlns:a16="http://schemas.microsoft.com/office/drawing/2014/main" id="{AC39BA42-28B9-8301-648B-54E0471E474C}"/>
               </a:ext>
             </a:extLst>
           </p:cNvPr>
@@ -4192,7 +4192,7 @@
     </p:spTree>
     <p:extLst>
       <p:ext uri="{BB962C8B-B14F-4D97-AF65-F5344CB8AC3E}">
-        <p14:creationId xmlns:p14="http://schemas.microsoft.com/office/powerpoint/2010/main" val="3394647044"/>
+        <p14:creationId xmlns:p14="http://schemas.microsoft.com/office/powerpoint/2010/main" val="1331005420"/>
       </p:ext>
     </p:extLst>
   </p:cSld>
@@ -4316,7 +4316,7 @@
           <p:cNvPr id="2" name="テキスト ボックス 1">
             <a:extLst>
               <a:ext uri="{FF2B5EF4-FFF2-40B4-BE49-F238E27FC236}">
-                <a16:creationId xmlns:a16="http://schemas.microsoft.com/office/drawing/2014/main" id="{1D7E3E9F-B513-5FF3-32AB-1642D4FED079}"/>
+                <a16:creationId xmlns:a16="http://schemas.microsoft.com/office/drawing/2014/main" id="{49C758A1-E60F-1629-B6DE-172AB5E40467}"/>
               </a:ext>
             </a:extLst>
           </p:cNvPr>
@@ -4362,7 +4362,7 @@
           <p:cNvPr id="3" name="テキスト ボックス 2">
             <a:extLst>
               <a:ext uri="{FF2B5EF4-FFF2-40B4-BE49-F238E27FC236}">
-                <a16:creationId xmlns:a16="http://schemas.microsoft.com/office/drawing/2014/main" id="{48F11EEE-974B-420A-DEED-7BC6322F5FB1}"/>
+                <a16:creationId xmlns:a16="http://schemas.microsoft.com/office/drawing/2014/main" id="{5E55D7B2-B79B-6A70-4E14-A9F0757020E7}"/>
               </a:ext>
             </a:extLst>
           </p:cNvPr>
@@ -4402,7 +4402,7 @@
           <p:cNvPr id="4" name="テキスト ボックス 3">
             <a:extLst>
               <a:ext uri="{FF2B5EF4-FFF2-40B4-BE49-F238E27FC236}">
-                <a16:creationId xmlns:a16="http://schemas.microsoft.com/office/drawing/2014/main" id="{3443C38C-6F7E-5B87-127C-39C57172D3F1}"/>
+                <a16:creationId xmlns:a16="http://schemas.microsoft.com/office/drawing/2014/main" id="{BF3E5627-6A3A-5BA9-F3BD-C7C6ABA70B61}"/>
               </a:ext>
             </a:extLst>
           </p:cNvPr>
@@ -4497,7 +4497,7 @@
           <p:cNvPr id="5" name="テキスト ボックス 4">
             <a:extLst>
               <a:ext uri="{FF2B5EF4-FFF2-40B4-BE49-F238E27FC236}">
-                <a16:creationId xmlns:a16="http://schemas.microsoft.com/office/drawing/2014/main" id="{9B2C529A-961D-BB7F-6625-FF3A00A77911}"/>
+                <a16:creationId xmlns:a16="http://schemas.microsoft.com/office/drawing/2014/main" id="{4D908545-B405-928D-8352-078FE4702FF6}"/>
               </a:ext>
             </a:extLst>
           </p:cNvPr>
@@ -4544,7 +4544,7 @@
             <a:hlinkClick r:id="" action="ppaction://media"/>
             <a:extLst>
               <a:ext uri="{FF2B5EF4-FFF2-40B4-BE49-F238E27FC236}">
-                <a16:creationId xmlns:a16="http://schemas.microsoft.com/office/drawing/2014/main" id="{82BA7CD9-9C40-725F-DB91-725C89B7C491}"/>
+                <a16:creationId xmlns:a16="http://schemas.microsoft.com/office/drawing/2014/main" id="{99B4192B-4860-59EF-22EB-050FDA99A8FD}"/>
               </a:ext>
             </a:extLst>
           </p:cNvPr>
@@ -4579,7 +4579,7 @@
     </p:spTree>
     <p:extLst>
       <p:ext uri="{BB962C8B-B14F-4D97-AF65-F5344CB8AC3E}">
-        <p14:creationId xmlns:p14="http://schemas.microsoft.com/office/powerpoint/2010/main" val="2902052144"/>
+        <p14:creationId xmlns:p14="http://schemas.microsoft.com/office/powerpoint/2010/main" val="3098194514"/>
       </p:ext>
     </p:extLst>
   </p:cSld>
@@ -4703,7 +4703,7 @@
           <p:cNvPr id="2" name="テキスト ボックス 1">
             <a:extLst>
               <a:ext uri="{FF2B5EF4-FFF2-40B4-BE49-F238E27FC236}">
-                <a16:creationId xmlns:a16="http://schemas.microsoft.com/office/drawing/2014/main" id="{CE3D9417-9C74-E2D6-45B9-8518D0EB8B90}"/>
+                <a16:creationId xmlns:a16="http://schemas.microsoft.com/office/drawing/2014/main" id="{F789B435-E899-8B1F-ABD4-7F18CF475AB2}"/>
               </a:ext>
             </a:extLst>
           </p:cNvPr>
@@ -4749,7 +4749,7 @@
           <p:cNvPr id="3" name="テキスト ボックス 2">
             <a:extLst>
               <a:ext uri="{FF2B5EF4-FFF2-40B4-BE49-F238E27FC236}">
-                <a16:creationId xmlns:a16="http://schemas.microsoft.com/office/drawing/2014/main" id="{69CB55DC-CB38-C555-1C7A-C0D06836ABD6}"/>
+                <a16:creationId xmlns:a16="http://schemas.microsoft.com/office/drawing/2014/main" id="{093FDFA7-2D4E-A79B-918E-184D06C12625}"/>
               </a:ext>
             </a:extLst>
           </p:cNvPr>
@@ -4789,7 +4789,7 @@
           <p:cNvPr id="4" name="テキスト ボックス 3">
             <a:extLst>
               <a:ext uri="{FF2B5EF4-FFF2-40B4-BE49-F238E27FC236}">
-                <a16:creationId xmlns:a16="http://schemas.microsoft.com/office/drawing/2014/main" id="{76784A21-2CDA-3F10-DA08-639CC700F41E}"/>
+                <a16:creationId xmlns:a16="http://schemas.microsoft.com/office/drawing/2014/main" id="{B7946C7C-C17E-B4D3-C2BB-8606AD9ADE09}"/>
               </a:ext>
             </a:extLst>
           </p:cNvPr>
@@ -4899,7 +4899,7 @@
           <p:cNvPr id="5" name="テキスト ボックス 4">
             <a:extLst>
               <a:ext uri="{FF2B5EF4-FFF2-40B4-BE49-F238E27FC236}">
-                <a16:creationId xmlns:a16="http://schemas.microsoft.com/office/drawing/2014/main" id="{05E73181-235F-BE57-3067-9B6C4BFF2F08}"/>
+                <a16:creationId xmlns:a16="http://schemas.microsoft.com/office/drawing/2014/main" id="{0EAFA794-087A-FB3A-1C91-79236B7DBFF8}"/>
               </a:ext>
             </a:extLst>
           </p:cNvPr>
@@ -4946,7 +4946,7 @@
             <a:hlinkClick r:id="" action="ppaction://media"/>
             <a:extLst>
               <a:ext uri="{FF2B5EF4-FFF2-40B4-BE49-F238E27FC236}">
-                <a16:creationId xmlns:a16="http://schemas.microsoft.com/office/drawing/2014/main" id="{C5B0299B-6E7B-4164-8F99-A4BF9DFAC407}"/>
+                <a16:creationId xmlns:a16="http://schemas.microsoft.com/office/drawing/2014/main" id="{64D0811F-FED2-15B8-09A7-C34DEF426587}"/>
               </a:ext>
             </a:extLst>
           </p:cNvPr>
@@ -4981,7 +4981,7 @@
     </p:spTree>
     <p:extLst>
       <p:ext uri="{BB962C8B-B14F-4D97-AF65-F5344CB8AC3E}">
-        <p14:creationId xmlns:p14="http://schemas.microsoft.com/office/powerpoint/2010/main" val="181194000"/>
+        <p14:creationId xmlns:p14="http://schemas.microsoft.com/office/powerpoint/2010/main" val="2857866372"/>
       </p:ext>
     </p:extLst>
   </p:cSld>
@@ -5105,7 +5105,7 @@
           <p:cNvPr id="2" name="テキスト ボックス 1">
             <a:extLst>
               <a:ext uri="{FF2B5EF4-FFF2-40B4-BE49-F238E27FC236}">
-                <a16:creationId xmlns:a16="http://schemas.microsoft.com/office/drawing/2014/main" id="{FB27AAA7-284F-7E12-C15A-BDD8E8BBC2BD}"/>
+                <a16:creationId xmlns:a16="http://schemas.microsoft.com/office/drawing/2014/main" id="{38310FA6-14F8-F0E9-50F2-7E490B7C444B}"/>
               </a:ext>
             </a:extLst>
           </p:cNvPr>
@@ -5151,7 +5151,7 @@
           <p:cNvPr id="3" name="テキスト ボックス 2">
             <a:extLst>
               <a:ext uri="{FF2B5EF4-FFF2-40B4-BE49-F238E27FC236}">
-                <a16:creationId xmlns:a16="http://schemas.microsoft.com/office/drawing/2014/main" id="{8329E61D-6BF7-A66D-6BC5-538C3005CD0D}"/>
+                <a16:creationId xmlns:a16="http://schemas.microsoft.com/office/drawing/2014/main" id="{B2152D5F-293C-EA57-7253-3C6D34355589}"/>
               </a:ext>
             </a:extLst>
           </p:cNvPr>
@@ -5191,7 +5191,7 @@
           <p:cNvPr id="4" name="テキスト ボックス 3">
             <a:extLst>
               <a:ext uri="{FF2B5EF4-FFF2-40B4-BE49-F238E27FC236}">
-                <a16:creationId xmlns:a16="http://schemas.microsoft.com/office/drawing/2014/main" id="{A949F838-9353-AF85-BB86-2D5E6C3E3FDA}"/>
+                <a16:creationId xmlns:a16="http://schemas.microsoft.com/office/drawing/2014/main" id="{47FE06D7-96D9-DBAD-1237-5B0F4826F3B1}"/>
               </a:ext>
             </a:extLst>
           </p:cNvPr>
@@ -5215,20 +5215,14 @@
           <a:lstStyle/>
           <a:p>
             <a:r>
-              <a:rPr kumimoji="1" lang="en-US" altLang="ja-JP" sz="2000">
+              <a:rPr kumimoji="1" lang="ja-JP" altLang="en-US" sz="2000">
                 <a:solidFill>
                   <a:srgbClr val="333333"/>
                 </a:solidFill>
                 <a:latin typeface="Arial" panose="020B0604020202020204" pitchFamily="34" charset="0"/>
               </a:rPr>
-              <a:t>Set confirmed custom domain</a:t>
-            </a:r>
-            <a:endParaRPr kumimoji="1" lang="ja-JP" altLang="en-US" sz="2000">
-              <a:solidFill>
-                <a:srgbClr val="333333"/>
-              </a:solidFill>
-              <a:latin typeface="Arial" panose="020B0604020202020204" pitchFamily="34" charset="0"/>
-            </a:endParaRPr>
+              <a:t>直近のコミットでは、実装の見直しと継続的な改善が行われました。</a:t>
+            </a:r>
           </a:p>
         </p:txBody>
       </p:sp>
@@ -5237,7 +5231,7 @@
           <p:cNvPr id="5" name="テキスト ボックス 4">
             <a:extLst>
               <a:ext uri="{FF2B5EF4-FFF2-40B4-BE49-F238E27FC236}">
-                <a16:creationId xmlns:a16="http://schemas.microsoft.com/office/drawing/2014/main" id="{FF08219C-F3F0-8689-04A3-31880B46A985}"/>
+                <a16:creationId xmlns:a16="http://schemas.microsoft.com/office/drawing/2014/main" id="{72464F02-942F-8851-75D3-6D049F18DFFE}"/>
               </a:ext>
             </a:extLst>
           </p:cNvPr>
@@ -5284,7 +5278,7 @@
             <a:hlinkClick r:id="" action="ppaction://media"/>
             <a:extLst>
               <a:ext uri="{FF2B5EF4-FFF2-40B4-BE49-F238E27FC236}">
-                <a16:creationId xmlns:a16="http://schemas.microsoft.com/office/drawing/2014/main" id="{CB1EB102-5160-1116-5740-F4880A2DC4E2}"/>
+                <a16:creationId xmlns:a16="http://schemas.microsoft.com/office/drawing/2014/main" id="{4C9A40BC-ED72-83FA-9AFD-F4EE6604B904}"/>
               </a:ext>
             </a:extLst>
           </p:cNvPr>
@@ -5319,7 +5313,7 @@
     </p:spTree>
     <p:extLst>
       <p:ext uri="{BB962C8B-B14F-4D97-AF65-F5344CB8AC3E}">
-        <p14:creationId xmlns:p14="http://schemas.microsoft.com/office/powerpoint/2010/main" val="3760142320"/>
+        <p14:creationId xmlns:p14="http://schemas.microsoft.com/office/powerpoint/2010/main" val="1994930608"/>
       </p:ext>
     </p:extLst>
   </p:cSld>
@@ -5362,7 +5356,7 @@
                                   <p:childTnLst>
                                     <p:cmd type="call" cmd="playFrom(0.0)">
                                       <p:cBhvr>
-                                        <p:cTn id="6" dur="6451" fill="hold"/>
+                                        <p:cTn id="6" dur="6076" fill="hold"/>
                                         <p:tgtEl>
                                           <p:spTgt spid="6"/>
                                         </p:tgtEl>
@@ -5443,7 +5437,7 @@
           <p:cNvPr id="2" name="テキスト ボックス 1">
             <a:extLst>
               <a:ext uri="{FF2B5EF4-FFF2-40B4-BE49-F238E27FC236}">
-                <a16:creationId xmlns:a16="http://schemas.microsoft.com/office/drawing/2014/main" id="{88DD2A18-3359-031E-3ABF-8BB2113D492D}"/>
+                <a16:creationId xmlns:a16="http://schemas.microsoft.com/office/drawing/2014/main" id="{B9760285-8DDF-0426-E4E0-2131E87AD13E}"/>
               </a:ext>
             </a:extLst>
           </p:cNvPr>
@@ -5489,7 +5483,7 @@
           <p:cNvPr id="3" name="テキスト ボックス 2">
             <a:extLst>
               <a:ext uri="{FF2B5EF4-FFF2-40B4-BE49-F238E27FC236}">
-                <a16:creationId xmlns:a16="http://schemas.microsoft.com/office/drawing/2014/main" id="{9E498147-20FA-5B39-4F85-34AD030EB947}"/>
+                <a16:creationId xmlns:a16="http://schemas.microsoft.com/office/drawing/2014/main" id="{109F49A9-D10C-433C-02CA-8B4ABCED82CB}"/>
               </a:ext>
             </a:extLst>
           </p:cNvPr>
@@ -5529,7 +5523,7 @@
           <p:cNvPr id="4" name="テキスト ボックス 3">
             <a:extLst>
               <a:ext uri="{FF2B5EF4-FFF2-40B4-BE49-F238E27FC236}">
-                <a16:creationId xmlns:a16="http://schemas.microsoft.com/office/drawing/2014/main" id="{A3920053-4D32-8953-21FB-0EEDCABDF449}"/>
+                <a16:creationId xmlns:a16="http://schemas.microsoft.com/office/drawing/2014/main" id="{B352BA24-9CC3-645F-36CD-0E16EFD31FAB}"/>
               </a:ext>
             </a:extLst>
           </p:cNvPr>
@@ -5594,7 +5588,7 @@
           <p:cNvPr id="5" name="テキスト ボックス 4">
             <a:extLst>
               <a:ext uri="{FF2B5EF4-FFF2-40B4-BE49-F238E27FC236}">
-                <a16:creationId xmlns:a16="http://schemas.microsoft.com/office/drawing/2014/main" id="{C2714591-EDC1-3927-3223-FC1BCD890B75}"/>
+                <a16:creationId xmlns:a16="http://schemas.microsoft.com/office/drawing/2014/main" id="{F9B4AD0F-5985-42F6-ED76-A747921089FE}"/>
               </a:ext>
             </a:extLst>
           </p:cNvPr>
@@ -5641,7 +5635,7 @@
             <a:hlinkClick r:id="" action="ppaction://media"/>
             <a:extLst>
               <a:ext uri="{FF2B5EF4-FFF2-40B4-BE49-F238E27FC236}">
-                <a16:creationId xmlns:a16="http://schemas.microsoft.com/office/drawing/2014/main" id="{52B19E5A-663E-6EFD-1D0B-E6874B1679C0}"/>
+                <a16:creationId xmlns:a16="http://schemas.microsoft.com/office/drawing/2014/main" id="{11AF5F0E-C290-775C-7476-BDF63A0F6921}"/>
               </a:ext>
             </a:extLst>
           </p:cNvPr>
@@ -5676,7 +5670,7 @@
     </p:spTree>
     <p:extLst>
       <p:ext uri="{BB962C8B-B14F-4D97-AF65-F5344CB8AC3E}">
-        <p14:creationId xmlns:p14="http://schemas.microsoft.com/office/powerpoint/2010/main" val="1597234498"/>
+        <p14:creationId xmlns:p14="http://schemas.microsoft.com/office/powerpoint/2010/main" val="845102748"/>
       </p:ext>
     </p:extLst>
   </p:cSld>
